--- a/docs/EcoReport_Sprint_2_Presentation.pptx
+++ b/docs/EcoReport_Sprint_2_Presentation.pptx
@@ -1662,7 +1662,7 @@
 </file>
 
 <file path=ppt/diagrams/colors3.xml><?xml version="1.0" encoding="utf-8"?>
-<dgm:colorsDef xmlns:dgm="http://schemas.openxmlformats.org/drawingml/2006/diagram" xmlns:a="http://schemas.openxmlformats.org/drawingml/2006/main" uniqueId="urn:microsoft.com/office/officeart/2018/5/colors/Iconchunking_coloredtext_colorful1">
+<dgm:colorsDef xmlns:dgm="http://schemas.openxmlformats.org/drawingml/2006/diagram" xmlns:a="http://schemas.openxmlformats.org/drawingml/2006/main" uniqueId="urn:microsoft.com/office/officeart/2018/5/colors/Iconchunking_neutralicon_colorful1">
   <dgm:title val=""/>
   <dgm:desc val=""/>
   <dgm:catLst>
@@ -2187,15 +2187,11 @@
   <dgm:styleLbl name="trAlignAcc1">
     <dgm:fillClrLst meth="repeat">
       <a:schemeClr val="lt1">
-        <a:alpha val="0"/>
+        <a:alpha val="40000"/>
       </a:schemeClr>
     </dgm:fillClrLst>
     <dgm:linClrLst meth="repeat">
-      <a:schemeClr val="accent2"/>
-      <a:schemeClr val="accent3"/>
-      <a:schemeClr val="accent4"/>
-      <a:schemeClr val="accent5"/>
-      <a:schemeClr val="accent6"/>
+      <a:schemeClr val="accent1"/>
     </dgm:linClrLst>
     <dgm:effectClrLst/>
     <dgm:txLinClrLst/>
@@ -2567,23 +2563,19 @@
   </dgm:styleLbl>
   <dgm:styleLbl name="revTx">
     <dgm:fillClrLst meth="repeat">
-      <a:schemeClr val="accent2">
+      <a:schemeClr val="lt1">
         <a:alpha val="0"/>
       </a:schemeClr>
     </dgm:fillClrLst>
     <dgm:linClrLst meth="repeat">
-      <a:schemeClr val="accent2">
+      <a:schemeClr val="dk1">
         <a:alpha val="0"/>
       </a:schemeClr>
     </dgm:linClrLst>
     <dgm:effectClrLst/>
     <dgm:txLinClrLst/>
     <dgm:txFillClrLst meth="repeat">
-      <a:schemeClr val="accent2"/>
-      <a:schemeClr val="accent3"/>
-      <a:schemeClr val="accent4"/>
-      <a:schemeClr val="accent5"/>
-      <a:schemeClr val="accent6"/>
+      <a:schemeClr val="tx1"/>
     </dgm:txFillClrLst>
     <dgm:txEffectClrLst/>
   </dgm:styleLbl>
@@ -3108,7 +3100,7 @@
 <dgm:dataModel xmlns:dgm="http://schemas.openxmlformats.org/drawingml/2006/diagram" xmlns:a="http://schemas.openxmlformats.org/drawingml/2006/main">
   <dgm:ptLst>
     <dgm:pt modelId="{F832DC6C-2579-4769-B236-42334AE7750F}" type="doc">
-      <dgm:prSet loTypeId="urn:microsoft.com/office/officeart/2018/5/layout/IconCircleLabelList" loCatId="icon" qsTypeId="urn:microsoft.com/office/officeart/2005/8/quickstyle/simple1" qsCatId="simple" csTypeId="urn:microsoft.com/office/officeart/2018/5/colors/Iconchunking_coloredtext_colorful1" csCatId="colorful" phldr="1"/>
+      <dgm:prSet loTypeId="urn:microsoft.com/office/officeart/2018/5/layout/IconCircleLabelList" loCatId="icon" qsTypeId="urn:microsoft.com/office/officeart/2005/8/quickstyle/simple1" qsCatId="simple" csTypeId="urn:microsoft.com/office/officeart/2018/5/colors/Iconchunking_neutralicon_colorful1" csCatId="colorful" phldr="1"/>
       <dgm:spPr/>
       <dgm:t>
         <a:bodyPr/>
@@ -3126,6 +3118,9 @@
         <a:lstStyle/>
         <a:p>
           <a:pPr>
+            <a:lnSpc>
+              <a:spcPct val="100000"/>
+            </a:lnSpc>
             <a:defRPr cap="all"/>
           </a:pPr>
           <a:r>
@@ -3165,12 +3160,16 @@
         <a:lstStyle/>
         <a:p>
           <a:pPr>
+            <a:lnSpc>
+              <a:spcPct val="100000"/>
+            </a:lnSpc>
             <a:defRPr cap="all"/>
           </a:pPr>
           <a:r>
-            <a:rPr lang="en-US"/>
-            <a:t>GeoJSON экспорт</a:t>
+            <a:rPr lang="ru-RU" dirty="0"/>
+            <a:t>Тестирование и отладка</a:t>
           </a:r>
+          <a:endParaRPr lang="en-US" dirty="0"/>
         </a:p>
       </dgm:t>
     </dgm:pt>
@@ -3204,13 +3203,16 @@
         <a:lstStyle/>
         <a:p>
           <a:pPr>
+            <a:lnSpc>
+              <a:spcPct val="100000"/>
+            </a:lnSpc>
             <a:defRPr cap="all"/>
           </a:pPr>
           <a:r>
-            <a:rPr lang="ru-RU"/>
-            <a:t>Вставка диаграммы и таблицы в отчёт</a:t>
+            <a:rPr lang="ru-RU" dirty="0"/>
+            <a:t>улучшение функционала</a:t>
           </a:r>
-          <a:endParaRPr lang="en-US"/>
+          <a:endParaRPr lang="en-US" dirty="0"/>
         </a:p>
       </dgm:t>
     </dgm:pt>
@@ -3236,7 +3238,7 @@
         </a:p>
       </dgm:t>
     </dgm:pt>
-    <dgm:pt modelId="{2D64A967-56AB-49E1-8D29-BCAC90A8C24F}" type="pres">
+    <dgm:pt modelId="{F0EEB85E-4E6A-4C12-8C9A-2975F8ACB611}" type="pres">
       <dgm:prSet presAssocID="{F832DC6C-2579-4769-B236-42334AE7750F}" presName="root" presStyleCnt="0">
         <dgm:presLayoutVars>
           <dgm:dir/>
@@ -3245,15 +3247,15 @@
       </dgm:prSet>
       <dgm:spPr/>
     </dgm:pt>
-    <dgm:pt modelId="{A4AF3A4E-59F8-4D61-84B1-3E819618132A}" type="pres">
+    <dgm:pt modelId="{314F3981-4F43-4373-8192-F5C72796F55C}" type="pres">
       <dgm:prSet presAssocID="{E763B407-EAD6-435D-A1CD-4C24D7C088B5}" presName="compNode" presStyleCnt="0"/>
       <dgm:spPr/>
     </dgm:pt>
-    <dgm:pt modelId="{4F385397-B7B7-4F3C-9195-BF8595AC809B}" type="pres">
+    <dgm:pt modelId="{C0C8F328-48AB-4D49-9514-4B8768A527B4}" type="pres">
       <dgm:prSet presAssocID="{E763B407-EAD6-435D-A1CD-4C24D7C088B5}" presName="iconBgRect" presStyleLbl="bgShp" presStyleIdx="0" presStyleCnt="3"/>
       <dgm:spPr/>
     </dgm:pt>
-    <dgm:pt modelId="{90369B30-14FA-4CBD-A4BC-8E2A75BCC4DF}" type="pres">
+    <dgm:pt modelId="{C86DDA7F-C8FB-4B37-9AB7-054C167D2172}" type="pres">
       <dgm:prSet presAssocID="{E763B407-EAD6-435D-A1CD-4C24D7C088B5}" presName="iconRect" presStyleLbl="node1" presStyleIdx="0" presStyleCnt="3"/>
       <dgm:spPr>
         <a:blipFill>
@@ -3281,11 +3283,11 @@
         </a:ext>
       </dgm:extLst>
     </dgm:pt>
-    <dgm:pt modelId="{63B2420C-25EE-4535-91EF-388ED4AA6A9F}" type="pres">
+    <dgm:pt modelId="{45737F1E-FEE5-4213-ABB2-F534A1EFBB75}" type="pres">
       <dgm:prSet presAssocID="{E763B407-EAD6-435D-A1CD-4C24D7C088B5}" presName="spaceRect" presStyleCnt="0"/>
       <dgm:spPr/>
     </dgm:pt>
-    <dgm:pt modelId="{4B8CBDAA-E910-4DC8-A6A4-B9D99CBDAE15}" type="pres">
+    <dgm:pt modelId="{2F91A7A7-A305-4140-9C95-2CBB8F236097}" type="pres">
       <dgm:prSet presAssocID="{E763B407-EAD6-435D-A1CD-4C24D7C088B5}" presName="textRect" presStyleLbl="revTx" presStyleIdx="0" presStyleCnt="3">
         <dgm:presLayoutVars>
           <dgm:chMax val="1"/>
@@ -3294,19 +3296,19 @@
       </dgm:prSet>
       <dgm:spPr/>
     </dgm:pt>
-    <dgm:pt modelId="{63EE9598-C8CE-4350-95B0-B1AD098DABBF}" type="pres">
+    <dgm:pt modelId="{1A482F43-EC4C-4CA0-B3B7-548BC2834BC3}" type="pres">
       <dgm:prSet presAssocID="{DD91E018-8CC5-40C5-A21D-9E0A9302FCD4}" presName="sibTrans" presStyleCnt="0"/>
       <dgm:spPr/>
     </dgm:pt>
-    <dgm:pt modelId="{EA8F3C4F-4723-4C44-947F-FD0320ECF1A9}" type="pres">
+    <dgm:pt modelId="{7A760D62-525F-451B-A3AE-C1D29581EA05}" type="pres">
       <dgm:prSet presAssocID="{77C80AD3-51E5-4E95-8A2E-0D44E03A496A}" presName="compNode" presStyleCnt="0"/>
       <dgm:spPr/>
     </dgm:pt>
-    <dgm:pt modelId="{E57A3BAA-083D-4B30-8311-28141DA0A6B7}" type="pres">
+    <dgm:pt modelId="{40BC7015-52A7-4D79-B6A4-4EF349818D86}" type="pres">
       <dgm:prSet presAssocID="{77C80AD3-51E5-4E95-8A2E-0D44E03A496A}" presName="iconBgRect" presStyleLbl="bgShp" presStyleIdx="1" presStyleCnt="3"/>
       <dgm:spPr/>
     </dgm:pt>
-    <dgm:pt modelId="{065EDACF-6F2A-41BF-AD1A-3A9CB29F65B8}" type="pres">
+    <dgm:pt modelId="{D61FCA42-F422-4E4F-AB10-A3F56E9042CA}" type="pres">
       <dgm:prSet presAssocID="{77C80AD3-51E5-4E95-8A2E-0D44E03A496A}" presName="iconRect" presStyleLbl="node1" presStyleIdx="1" presStyleCnt="3"/>
       <dgm:spPr>
         <a:blipFill>
@@ -3330,15 +3332,15 @@
       </dgm:spPr>
       <dgm:extLst>
         <a:ext uri="{E40237B7-FDA0-4F09-8148-C483321AD2D9}">
-          <dgm14:cNvPr xmlns:dgm14="http://schemas.microsoft.com/office/drawing/2010/diagram" id="0" name="" descr="Arrow: Slight curve"/>
+          <dgm14:cNvPr xmlns:dgm14="http://schemas.microsoft.com/office/drawing/2010/diagram" id="0" name="" descr="Флажок"/>
         </a:ext>
       </dgm:extLst>
     </dgm:pt>
-    <dgm:pt modelId="{FDA3205D-F30D-426D-B898-DA053E3E8889}" type="pres">
+    <dgm:pt modelId="{C5079305-2371-4B00-9664-C754533C7BF4}" type="pres">
       <dgm:prSet presAssocID="{77C80AD3-51E5-4E95-8A2E-0D44E03A496A}" presName="spaceRect" presStyleCnt="0"/>
       <dgm:spPr/>
     </dgm:pt>
-    <dgm:pt modelId="{F50FF6F0-A5A5-4E8C-8F95-632760FD523F}" type="pres">
+    <dgm:pt modelId="{55E382E8-A6A1-4136-A4D9-2D7A5FD52D24}" type="pres">
       <dgm:prSet presAssocID="{77C80AD3-51E5-4E95-8A2E-0D44E03A496A}" presName="textRect" presStyleLbl="revTx" presStyleIdx="1" presStyleCnt="3">
         <dgm:presLayoutVars>
           <dgm:chMax val="1"/>
@@ -3347,19 +3349,19 @@
       </dgm:prSet>
       <dgm:spPr/>
     </dgm:pt>
-    <dgm:pt modelId="{05BF7B02-D985-4D60-AB08-FD2EFFE2B421}" type="pres">
+    <dgm:pt modelId="{EEC17F74-5398-4EB3-A140-7359448C2478}" type="pres">
       <dgm:prSet presAssocID="{3F0E97FB-25CD-4716-B6E1-0A5D32381DE7}" presName="sibTrans" presStyleCnt="0"/>
       <dgm:spPr/>
     </dgm:pt>
-    <dgm:pt modelId="{EAC9D26E-59FE-48A9-9020-4ED4C97406AF}" type="pres">
+    <dgm:pt modelId="{1D670F92-E5AD-4B61-A059-BD37F4DC2D05}" type="pres">
       <dgm:prSet presAssocID="{AA98FA75-C66F-48DA-BB0F-5B6C9FC96D41}" presName="compNode" presStyleCnt="0"/>
       <dgm:spPr/>
     </dgm:pt>
-    <dgm:pt modelId="{71A54257-2F3F-4C07-A5BE-0471B231ABBE}" type="pres">
+    <dgm:pt modelId="{D9ECCD46-7E89-441A-95E1-55CCD95B0A12}" type="pres">
       <dgm:prSet presAssocID="{AA98FA75-C66F-48DA-BB0F-5B6C9FC96D41}" presName="iconBgRect" presStyleLbl="bgShp" presStyleIdx="2" presStyleCnt="3"/>
       <dgm:spPr/>
     </dgm:pt>
-    <dgm:pt modelId="{74BF485E-F94E-40BA-89CC-D4D62E7C5B93}" type="pres">
+    <dgm:pt modelId="{D3CBA863-4644-4F06-A3DC-BB48B5F01B02}" type="pres">
       <dgm:prSet presAssocID="{AA98FA75-C66F-48DA-BB0F-5B6C9FC96D41}" presName="iconRect" presStyleLbl="node1" presStyleIdx="2" presStyleCnt="3"/>
       <dgm:spPr>
         <a:blipFill>
@@ -3383,15 +3385,15 @@
       </dgm:spPr>
       <dgm:extLst>
         <a:ext uri="{E40237B7-FDA0-4F09-8148-C483321AD2D9}">
-          <dgm14:cNvPr xmlns:dgm14="http://schemas.microsoft.com/office/drawing/2010/diagram" id="0" name="" descr="Bar chart"/>
+          <dgm14:cNvPr xmlns:dgm14="http://schemas.microsoft.com/office/drawing/2010/diagram" id="0" name="" descr="Upward trend"/>
         </a:ext>
       </dgm:extLst>
     </dgm:pt>
-    <dgm:pt modelId="{3B4CF2A4-A5D1-4EBB-BF38-0136BEA68661}" type="pres">
+    <dgm:pt modelId="{95B0A700-602B-412E-ACED-98E800492DBA}" type="pres">
       <dgm:prSet presAssocID="{AA98FA75-C66F-48DA-BB0F-5B6C9FC96D41}" presName="spaceRect" presStyleCnt="0"/>
       <dgm:spPr/>
     </dgm:pt>
-    <dgm:pt modelId="{77A6B2E0-2F38-4033-A40C-09618C1EA75E}" type="pres">
+    <dgm:pt modelId="{6B5ED305-2DA6-4146-86F4-2BFD8EBEA918}" type="pres">
       <dgm:prSet presAssocID="{AA98FA75-C66F-48DA-BB0F-5B6C9FC96D41}" presName="textRect" presStyleLbl="revTx" presStyleIdx="2" presStyleCnt="3">
         <dgm:presLayoutVars>
           <dgm:chMax val="1"/>
@@ -3402,30 +3404,30 @@
     </dgm:pt>
   </dgm:ptLst>
   <dgm:cxnLst>
-    <dgm:cxn modelId="{11D5283A-E8D0-4AB9-8C04-E400711C0D5A}" type="presOf" srcId="{E763B407-EAD6-435D-A1CD-4C24D7C088B5}" destId="{4B8CBDAA-E910-4DC8-A6A4-B9D99CBDAE15}" srcOrd="0" destOrd="0" presId="urn:microsoft.com/office/officeart/2018/5/layout/IconCircleLabelList"/>
-    <dgm:cxn modelId="{DF16787A-7C2F-422E-9750-9D1F5043ADCE}" type="presOf" srcId="{77C80AD3-51E5-4E95-8A2E-0D44E03A496A}" destId="{F50FF6F0-A5A5-4E8C-8F95-632760FD523F}" srcOrd="0" destOrd="0" presId="urn:microsoft.com/office/officeart/2018/5/layout/IconCircleLabelList"/>
+    <dgm:cxn modelId="{5E0BDC02-B221-43FA-AB2E-2B3D77E6D8BE}" type="presOf" srcId="{77C80AD3-51E5-4E95-8A2E-0D44E03A496A}" destId="{55E382E8-A6A1-4136-A4D9-2D7A5FD52D24}" srcOrd="0" destOrd="0" presId="urn:microsoft.com/office/officeart/2018/5/layout/IconCircleLabelList"/>
+    <dgm:cxn modelId="{14600B3C-BFC1-4C53-93D5-2051C95A71C0}" type="presOf" srcId="{AA98FA75-C66F-48DA-BB0F-5B6C9FC96D41}" destId="{6B5ED305-2DA6-4146-86F4-2BFD8EBEA918}" srcOrd="0" destOrd="0" presId="urn:microsoft.com/office/officeart/2018/5/layout/IconCircleLabelList"/>
     <dgm:cxn modelId="{1E675B90-829F-43AD-AA55-1B92718D15CA}" srcId="{F832DC6C-2579-4769-B236-42334AE7750F}" destId="{E763B407-EAD6-435D-A1CD-4C24D7C088B5}" srcOrd="0" destOrd="0" parTransId="{CE4610CB-0C8C-4B51-B428-4B3CCFD2151F}" sibTransId="{DD91E018-8CC5-40C5-A21D-9E0A9302FCD4}"/>
     <dgm:cxn modelId="{CC39C49D-6A17-4178-838D-EBB691A3719F}" srcId="{F832DC6C-2579-4769-B236-42334AE7750F}" destId="{AA98FA75-C66F-48DA-BB0F-5B6C9FC96D41}" srcOrd="2" destOrd="0" parTransId="{6D826BEF-E9AB-4496-8F4B-C7245DD1A906}" sibTransId="{857B88E2-0BFC-4831-8029-0B5B1E44E41F}"/>
-    <dgm:cxn modelId="{A5897CA1-192F-4C9D-A7FD-4CF9A9B38215}" type="presOf" srcId="{AA98FA75-C66F-48DA-BB0F-5B6C9FC96D41}" destId="{77A6B2E0-2F38-4033-A40C-09618C1EA75E}" srcOrd="0" destOrd="0" presId="urn:microsoft.com/office/officeart/2018/5/layout/IconCircleLabelList"/>
+    <dgm:cxn modelId="{0C214BB9-C499-48F6-BCF9-CA674881E575}" type="presOf" srcId="{E763B407-EAD6-435D-A1CD-4C24D7C088B5}" destId="{2F91A7A7-A305-4140-9C95-2CBB8F236097}" srcOrd="0" destOrd="0" presId="urn:microsoft.com/office/officeart/2018/5/layout/IconCircleLabelList"/>
+    <dgm:cxn modelId="{904B2AC3-9A61-4C13-86CF-F2F37447F0CF}" type="presOf" srcId="{F832DC6C-2579-4769-B236-42334AE7750F}" destId="{F0EEB85E-4E6A-4C12-8C9A-2975F8ACB611}" srcOrd="0" destOrd="0" presId="urn:microsoft.com/office/officeart/2018/5/layout/IconCircleLabelList"/>
     <dgm:cxn modelId="{4BCDD8EA-6322-4726-83CC-5023295BC03B}" srcId="{F832DC6C-2579-4769-B236-42334AE7750F}" destId="{77C80AD3-51E5-4E95-8A2E-0D44E03A496A}" srcOrd="1" destOrd="0" parTransId="{F1B0D40C-AA96-4D9B-BDB5-CC0AC0821E83}" sibTransId="{3F0E97FB-25CD-4716-B6E1-0A5D32381DE7}"/>
-    <dgm:cxn modelId="{09B161F7-8BC8-483F-9A1D-4916D1497555}" type="presOf" srcId="{F832DC6C-2579-4769-B236-42334AE7750F}" destId="{2D64A967-56AB-49E1-8D29-BCAC90A8C24F}" srcOrd="0" destOrd="0" presId="urn:microsoft.com/office/officeart/2018/5/layout/IconCircleLabelList"/>
-    <dgm:cxn modelId="{684DEF51-5DF0-4B99-8654-A9E22738BEC9}" type="presParOf" srcId="{2D64A967-56AB-49E1-8D29-BCAC90A8C24F}" destId="{A4AF3A4E-59F8-4D61-84B1-3E819618132A}" srcOrd="0" destOrd="0" presId="urn:microsoft.com/office/officeart/2018/5/layout/IconCircleLabelList"/>
-    <dgm:cxn modelId="{5568505A-FDCC-49FB-B876-2DCE821191DC}" type="presParOf" srcId="{A4AF3A4E-59F8-4D61-84B1-3E819618132A}" destId="{4F385397-B7B7-4F3C-9195-BF8595AC809B}" srcOrd="0" destOrd="0" presId="urn:microsoft.com/office/officeart/2018/5/layout/IconCircleLabelList"/>
-    <dgm:cxn modelId="{6B9BBF60-13E3-46A6-8809-D17A4A9F6144}" type="presParOf" srcId="{A4AF3A4E-59F8-4D61-84B1-3E819618132A}" destId="{90369B30-14FA-4CBD-A4BC-8E2A75BCC4DF}" srcOrd="1" destOrd="0" presId="urn:microsoft.com/office/officeart/2018/5/layout/IconCircleLabelList"/>
-    <dgm:cxn modelId="{B94E78D6-78D1-4B97-96D7-EE6C32D9DEB6}" type="presParOf" srcId="{A4AF3A4E-59F8-4D61-84B1-3E819618132A}" destId="{63B2420C-25EE-4535-91EF-388ED4AA6A9F}" srcOrd="2" destOrd="0" presId="urn:microsoft.com/office/officeart/2018/5/layout/IconCircleLabelList"/>
-    <dgm:cxn modelId="{2F1A916E-0F5A-4076-A6BD-96C5ED8BC9DF}" type="presParOf" srcId="{A4AF3A4E-59F8-4D61-84B1-3E819618132A}" destId="{4B8CBDAA-E910-4DC8-A6A4-B9D99CBDAE15}" srcOrd="3" destOrd="0" presId="urn:microsoft.com/office/officeart/2018/5/layout/IconCircleLabelList"/>
-    <dgm:cxn modelId="{52B5FC10-791D-4990-9D36-1DC004CCC852}" type="presParOf" srcId="{2D64A967-56AB-49E1-8D29-BCAC90A8C24F}" destId="{63EE9598-C8CE-4350-95B0-B1AD098DABBF}" srcOrd="1" destOrd="0" presId="urn:microsoft.com/office/officeart/2018/5/layout/IconCircleLabelList"/>
-    <dgm:cxn modelId="{0B9B668E-23AB-4815-A1C9-5442A6B979CC}" type="presParOf" srcId="{2D64A967-56AB-49E1-8D29-BCAC90A8C24F}" destId="{EA8F3C4F-4723-4C44-947F-FD0320ECF1A9}" srcOrd="2" destOrd="0" presId="urn:microsoft.com/office/officeart/2018/5/layout/IconCircleLabelList"/>
-    <dgm:cxn modelId="{BA5F4544-5524-4F39-ABD8-6A11309C0D7F}" type="presParOf" srcId="{EA8F3C4F-4723-4C44-947F-FD0320ECF1A9}" destId="{E57A3BAA-083D-4B30-8311-28141DA0A6B7}" srcOrd="0" destOrd="0" presId="urn:microsoft.com/office/officeart/2018/5/layout/IconCircleLabelList"/>
-    <dgm:cxn modelId="{A47D8F59-E240-4C72-B23F-BD85E08942AA}" type="presParOf" srcId="{EA8F3C4F-4723-4C44-947F-FD0320ECF1A9}" destId="{065EDACF-6F2A-41BF-AD1A-3A9CB29F65B8}" srcOrd="1" destOrd="0" presId="urn:microsoft.com/office/officeart/2018/5/layout/IconCircleLabelList"/>
-    <dgm:cxn modelId="{E49FB964-DC0E-4C8F-8BAF-7D1C22325270}" type="presParOf" srcId="{EA8F3C4F-4723-4C44-947F-FD0320ECF1A9}" destId="{FDA3205D-F30D-426D-B898-DA053E3E8889}" srcOrd="2" destOrd="0" presId="urn:microsoft.com/office/officeart/2018/5/layout/IconCircleLabelList"/>
-    <dgm:cxn modelId="{F6FC7163-EB87-4B17-9A8F-920275FB07CA}" type="presParOf" srcId="{EA8F3C4F-4723-4C44-947F-FD0320ECF1A9}" destId="{F50FF6F0-A5A5-4E8C-8F95-632760FD523F}" srcOrd="3" destOrd="0" presId="urn:microsoft.com/office/officeart/2018/5/layout/IconCircleLabelList"/>
-    <dgm:cxn modelId="{C1FAB95A-97AF-47DB-A9A6-E7536B929BB4}" type="presParOf" srcId="{2D64A967-56AB-49E1-8D29-BCAC90A8C24F}" destId="{05BF7B02-D985-4D60-AB08-FD2EFFE2B421}" srcOrd="3" destOrd="0" presId="urn:microsoft.com/office/officeart/2018/5/layout/IconCircleLabelList"/>
-    <dgm:cxn modelId="{0A32B84F-973A-4F17-B739-A37CB49185AA}" type="presParOf" srcId="{2D64A967-56AB-49E1-8D29-BCAC90A8C24F}" destId="{EAC9D26E-59FE-48A9-9020-4ED4C97406AF}" srcOrd="4" destOrd="0" presId="urn:microsoft.com/office/officeart/2018/5/layout/IconCircleLabelList"/>
-    <dgm:cxn modelId="{B68A5164-9877-45E8-9FD2-70C84A2D2FB7}" type="presParOf" srcId="{EAC9D26E-59FE-48A9-9020-4ED4C97406AF}" destId="{71A54257-2F3F-4C07-A5BE-0471B231ABBE}" srcOrd="0" destOrd="0" presId="urn:microsoft.com/office/officeart/2018/5/layout/IconCircleLabelList"/>
-    <dgm:cxn modelId="{6001F543-9245-4DAC-9A42-7C652BEF19DA}" type="presParOf" srcId="{EAC9D26E-59FE-48A9-9020-4ED4C97406AF}" destId="{74BF485E-F94E-40BA-89CC-D4D62E7C5B93}" srcOrd="1" destOrd="0" presId="urn:microsoft.com/office/officeart/2018/5/layout/IconCircleLabelList"/>
-    <dgm:cxn modelId="{A3366BFD-EE25-4B3C-85C2-84CD61C29D1A}" type="presParOf" srcId="{EAC9D26E-59FE-48A9-9020-4ED4C97406AF}" destId="{3B4CF2A4-A5D1-4EBB-BF38-0136BEA68661}" srcOrd="2" destOrd="0" presId="urn:microsoft.com/office/officeart/2018/5/layout/IconCircleLabelList"/>
-    <dgm:cxn modelId="{246328BD-A149-41F9-B778-9AF85B0E7ABA}" type="presParOf" srcId="{EAC9D26E-59FE-48A9-9020-4ED4C97406AF}" destId="{77A6B2E0-2F38-4033-A40C-09618C1EA75E}" srcOrd="3" destOrd="0" presId="urn:microsoft.com/office/officeart/2018/5/layout/IconCircleLabelList"/>
+    <dgm:cxn modelId="{BB8C0E4B-FB9B-42FC-B260-9ACBE3F5F62F}" type="presParOf" srcId="{F0EEB85E-4E6A-4C12-8C9A-2975F8ACB611}" destId="{314F3981-4F43-4373-8192-F5C72796F55C}" srcOrd="0" destOrd="0" presId="urn:microsoft.com/office/officeart/2018/5/layout/IconCircleLabelList"/>
+    <dgm:cxn modelId="{DA34274D-91D6-4DAF-8FB2-F8996CB8B574}" type="presParOf" srcId="{314F3981-4F43-4373-8192-F5C72796F55C}" destId="{C0C8F328-48AB-4D49-9514-4B8768A527B4}" srcOrd="0" destOrd="0" presId="urn:microsoft.com/office/officeart/2018/5/layout/IconCircleLabelList"/>
+    <dgm:cxn modelId="{B359D60F-C7B4-49DF-8BEE-9DF6C9542271}" type="presParOf" srcId="{314F3981-4F43-4373-8192-F5C72796F55C}" destId="{C86DDA7F-C8FB-4B37-9AB7-054C167D2172}" srcOrd="1" destOrd="0" presId="urn:microsoft.com/office/officeart/2018/5/layout/IconCircleLabelList"/>
+    <dgm:cxn modelId="{55707A01-D1DE-46EA-811E-334FA97D289D}" type="presParOf" srcId="{314F3981-4F43-4373-8192-F5C72796F55C}" destId="{45737F1E-FEE5-4213-ABB2-F534A1EFBB75}" srcOrd="2" destOrd="0" presId="urn:microsoft.com/office/officeart/2018/5/layout/IconCircleLabelList"/>
+    <dgm:cxn modelId="{6AB604C7-D6EF-4651-B80C-2833D2927419}" type="presParOf" srcId="{314F3981-4F43-4373-8192-F5C72796F55C}" destId="{2F91A7A7-A305-4140-9C95-2CBB8F236097}" srcOrd="3" destOrd="0" presId="urn:microsoft.com/office/officeart/2018/5/layout/IconCircleLabelList"/>
+    <dgm:cxn modelId="{481B8A83-9E74-4999-8AE7-8755ED2D12FE}" type="presParOf" srcId="{F0EEB85E-4E6A-4C12-8C9A-2975F8ACB611}" destId="{1A482F43-EC4C-4CA0-B3B7-548BC2834BC3}" srcOrd="1" destOrd="0" presId="urn:microsoft.com/office/officeart/2018/5/layout/IconCircleLabelList"/>
+    <dgm:cxn modelId="{5988CACD-0327-4D97-A1A5-BCC08D54583D}" type="presParOf" srcId="{F0EEB85E-4E6A-4C12-8C9A-2975F8ACB611}" destId="{7A760D62-525F-451B-A3AE-C1D29581EA05}" srcOrd="2" destOrd="0" presId="urn:microsoft.com/office/officeart/2018/5/layout/IconCircleLabelList"/>
+    <dgm:cxn modelId="{2EC13EA4-B77C-4B03-AAEF-58155D5DAEFA}" type="presParOf" srcId="{7A760D62-525F-451B-A3AE-C1D29581EA05}" destId="{40BC7015-52A7-4D79-B6A4-4EF349818D86}" srcOrd="0" destOrd="0" presId="urn:microsoft.com/office/officeart/2018/5/layout/IconCircleLabelList"/>
+    <dgm:cxn modelId="{AD98C209-6847-4C65-9B3A-8B6D1C59D789}" type="presParOf" srcId="{7A760D62-525F-451B-A3AE-C1D29581EA05}" destId="{D61FCA42-F422-4E4F-AB10-A3F56E9042CA}" srcOrd="1" destOrd="0" presId="urn:microsoft.com/office/officeart/2018/5/layout/IconCircleLabelList"/>
+    <dgm:cxn modelId="{D41D26F0-CE84-4A5E-8C35-1DE794B937DA}" type="presParOf" srcId="{7A760D62-525F-451B-A3AE-C1D29581EA05}" destId="{C5079305-2371-4B00-9664-C754533C7BF4}" srcOrd="2" destOrd="0" presId="urn:microsoft.com/office/officeart/2018/5/layout/IconCircleLabelList"/>
+    <dgm:cxn modelId="{8793E4F8-8327-44DD-9C0F-1DCADC8D3679}" type="presParOf" srcId="{7A760D62-525F-451B-A3AE-C1D29581EA05}" destId="{55E382E8-A6A1-4136-A4D9-2D7A5FD52D24}" srcOrd="3" destOrd="0" presId="urn:microsoft.com/office/officeart/2018/5/layout/IconCircleLabelList"/>
+    <dgm:cxn modelId="{DA9AF28F-72C1-4512-B9C0-433A115BA393}" type="presParOf" srcId="{F0EEB85E-4E6A-4C12-8C9A-2975F8ACB611}" destId="{EEC17F74-5398-4EB3-A140-7359448C2478}" srcOrd="3" destOrd="0" presId="urn:microsoft.com/office/officeart/2018/5/layout/IconCircleLabelList"/>
+    <dgm:cxn modelId="{CAF14F30-6D91-4C5F-B789-3D8E71849F26}" type="presParOf" srcId="{F0EEB85E-4E6A-4C12-8C9A-2975F8ACB611}" destId="{1D670F92-E5AD-4B61-A059-BD37F4DC2D05}" srcOrd="4" destOrd="0" presId="urn:microsoft.com/office/officeart/2018/5/layout/IconCircleLabelList"/>
+    <dgm:cxn modelId="{F9CA5A52-2A3C-4868-920F-ED3F65388730}" type="presParOf" srcId="{1D670F92-E5AD-4B61-A059-BD37F4DC2D05}" destId="{D9ECCD46-7E89-441A-95E1-55CCD95B0A12}" srcOrd="0" destOrd="0" presId="urn:microsoft.com/office/officeart/2018/5/layout/IconCircleLabelList"/>
+    <dgm:cxn modelId="{7152DF00-CF45-4C56-B3C9-FE588D67547B}" type="presParOf" srcId="{1D670F92-E5AD-4B61-A059-BD37F4DC2D05}" destId="{D3CBA863-4644-4F06-A3DC-BB48B5F01B02}" srcOrd="1" destOrd="0" presId="urn:microsoft.com/office/officeart/2018/5/layout/IconCircleLabelList"/>
+    <dgm:cxn modelId="{71009B22-2D58-480C-B0B9-B12F227E329C}" type="presParOf" srcId="{1D670F92-E5AD-4B61-A059-BD37F4DC2D05}" destId="{95B0A700-602B-412E-ACED-98E800492DBA}" srcOrd="2" destOrd="0" presId="urn:microsoft.com/office/officeart/2018/5/layout/IconCircleLabelList"/>
+    <dgm:cxn modelId="{FDFC5E09-C6AA-4A32-8A56-80CAD85C375D}" type="presParOf" srcId="{1D670F92-E5AD-4B61-A059-BD37F4DC2D05}" destId="{6B5ED305-2DA6-4146-86F4-2BFD8EBEA918}" srcOrd="3" destOrd="0" presId="urn:microsoft.com/office/officeart/2018/5/layout/IconCircleLabelList"/>
   </dgm:cxnLst>
   <dgm:bg/>
   <dgm:whole/>
@@ -4172,7 +4174,7 @@
       <dsp:cNvGrpSpPr/>
     </dsp:nvGrpSpPr>
     <dsp:grpSpPr/>
-    <dsp:sp modelId="{4F385397-B7B7-4F3C-9195-BF8595AC809B}">
+    <dsp:sp modelId="{C0C8F328-48AB-4D49-9514-4B8768A527B4}">
       <dsp:nvSpPr>
         <dsp:cNvPr id="0" name=""/>
         <dsp:cNvSpPr/>
@@ -4211,7 +4213,7 @@
         <a:fontRef idx="minor"/>
       </dsp:style>
     </dsp:sp>
-    <dsp:sp modelId="{90369B30-14FA-4CBD-A4BC-8E2A75BCC4DF}">
+    <dsp:sp modelId="{C86DDA7F-C8FB-4B37-9AB7-054C167D2172}">
       <dsp:nvSpPr>
         <dsp:cNvPr id="0" name=""/>
         <dsp:cNvSpPr/>
@@ -4260,7 +4262,7 @@
         </a:fontRef>
       </dsp:style>
     </dsp:sp>
-    <dsp:sp modelId="{4B8CBDAA-E910-4DC8-A6A4-B9D99CBDAE15}">
+    <dsp:sp modelId="{2F91A7A7-A305-4140-9C95-2CBB8F236097}">
       <dsp:nvSpPr>
         <dsp:cNvPr id="0" name=""/>
         <dsp:cNvSpPr/>
@@ -4297,9 +4299,9 @@
         </a:bodyPr>
         <a:lstStyle/>
         <a:p>
-          <a:pPr marL="0" lvl="0" indent="0" algn="ctr" defTabSz="844550">
+          <a:pPr marL="0" lvl="0" indent="0" algn="ctr" defTabSz="1022350">
             <a:lnSpc>
-              <a:spcPct val="90000"/>
+              <a:spcPct val="100000"/>
             </a:lnSpc>
             <a:spcBef>
               <a:spcPct val="0"/>
@@ -4311,7 +4313,7 @@
             <a:defRPr cap="all"/>
           </a:pPr>
           <a:r>
-            <a:rPr lang="en-US" sz="1900" kern="1200"/>
+            <a:rPr lang="en-US" sz="2300" kern="1200"/>
             <a:t>UI/UX улучшения</a:t>
           </a:r>
         </a:p>
@@ -4321,7 +4323,7 @@
         <a:ext cx="2418750" cy="720000"/>
       </dsp:txXfrm>
     </dsp:sp>
-    <dsp:sp modelId="{E57A3BAA-083D-4B30-8311-28141DA0A6B7}">
+    <dsp:sp modelId="{40BC7015-52A7-4D79-B6A4-4EF349818D86}">
       <dsp:nvSpPr>
         <dsp:cNvPr id="0" name=""/>
         <dsp:cNvSpPr/>
@@ -4360,7 +4362,7 @@
         <a:fontRef idx="minor"/>
       </dsp:style>
     </dsp:sp>
-    <dsp:sp modelId="{065EDACF-6F2A-41BF-AD1A-3A9CB29F65B8}">
+    <dsp:sp modelId="{D61FCA42-F422-4E4F-AB10-A3F56E9042CA}">
       <dsp:nvSpPr>
         <dsp:cNvPr id="0" name=""/>
         <dsp:cNvSpPr/>
@@ -4409,7 +4411,7 @@
         </a:fontRef>
       </dsp:style>
     </dsp:sp>
-    <dsp:sp modelId="{F50FF6F0-A5A5-4E8C-8F95-632760FD523F}">
+    <dsp:sp modelId="{55E382E8-A6A1-4136-A4D9-2D7A5FD52D24}">
       <dsp:nvSpPr>
         <dsp:cNvPr id="0" name=""/>
         <dsp:cNvSpPr/>
@@ -4446,9 +4448,9 @@
         </a:bodyPr>
         <a:lstStyle/>
         <a:p>
-          <a:pPr marL="0" lvl="0" indent="0" algn="ctr" defTabSz="844550">
+          <a:pPr marL="0" lvl="0" indent="0" algn="ctr" defTabSz="1022350">
             <a:lnSpc>
-              <a:spcPct val="90000"/>
+              <a:spcPct val="100000"/>
             </a:lnSpc>
             <a:spcBef>
               <a:spcPct val="0"/>
@@ -4460,9 +4462,10 @@
             <a:defRPr cap="all"/>
           </a:pPr>
           <a:r>
-            <a:rPr lang="en-US" sz="1900" kern="1200"/>
-            <a:t>GeoJSON экспорт</a:t>
+            <a:rPr lang="ru-RU" sz="2300" kern="1200" dirty="0"/>
+            <a:t>Тестирование и отладка</a:t>
           </a:r>
+          <a:endParaRPr lang="en-US" sz="2300" kern="1200" dirty="0"/>
         </a:p>
       </dsp:txBody>
       <dsp:txXfrm>
@@ -4470,7 +4473,7 @@
         <a:ext cx="2418750" cy="720000"/>
       </dsp:txXfrm>
     </dsp:sp>
-    <dsp:sp modelId="{71A54257-2F3F-4C07-A5BE-0471B231ABBE}">
+    <dsp:sp modelId="{D9ECCD46-7E89-441A-95E1-55CCD95B0A12}">
       <dsp:nvSpPr>
         <dsp:cNvPr id="0" name=""/>
         <dsp:cNvSpPr/>
@@ -4509,7 +4512,7 @@
         <a:fontRef idx="minor"/>
       </dsp:style>
     </dsp:sp>
-    <dsp:sp modelId="{74BF485E-F94E-40BA-89CC-D4D62E7C5B93}">
+    <dsp:sp modelId="{D3CBA863-4644-4F06-A3DC-BB48B5F01B02}">
       <dsp:nvSpPr>
         <dsp:cNvPr id="0" name=""/>
         <dsp:cNvSpPr/>
@@ -4558,7 +4561,7 @@
         </a:fontRef>
       </dsp:style>
     </dsp:sp>
-    <dsp:sp modelId="{77A6B2E0-2F38-4033-A40C-09618C1EA75E}">
+    <dsp:sp modelId="{6B5ED305-2DA6-4146-86F4-2BFD8EBEA918}">
       <dsp:nvSpPr>
         <dsp:cNvPr id="0" name=""/>
         <dsp:cNvSpPr/>
@@ -4595,9 +4598,9 @@
         </a:bodyPr>
         <a:lstStyle/>
         <a:p>
-          <a:pPr marL="0" lvl="0" indent="0" algn="ctr" defTabSz="844550">
+          <a:pPr marL="0" lvl="0" indent="0" algn="ctr" defTabSz="1022350">
             <a:lnSpc>
-              <a:spcPct val="90000"/>
+              <a:spcPct val="100000"/>
             </a:lnSpc>
             <a:spcBef>
               <a:spcPct val="0"/>
@@ -4609,10 +4612,10 @@
             <a:defRPr cap="all"/>
           </a:pPr>
           <a:r>
-            <a:rPr lang="ru-RU" sz="1900" kern="1200"/>
-            <a:t>Вставка диаграммы и таблицы в отчёт</a:t>
+            <a:rPr lang="ru-RU" sz="2300" kern="1200" dirty="0"/>
+            <a:t>улучшение функционала</a:t>
           </a:r>
-          <a:endParaRPr lang="en-US" sz="1900" kern="1200"/>
+          <a:endParaRPr lang="en-US" sz="2300" kern="1200" dirty="0"/>
         </a:p>
       </dsp:txBody>
       <dsp:txXfrm>
@@ -8916,7 +8919,7 @@
           <a:p>
             <a:fld id="{5BCAD085-E8A6-8845-BD4E-CB4CCA059FC4}" type="datetimeFigureOut">
               <a:rPr lang="en-US" smtClean="0"/>
-              <a:t>3/24/2026</a:t>
+              <a:t>3/25/2026</a:t>
             </a:fld>
             <a:endParaRPr lang="en-US"/>
           </a:p>
@@ -9084,7 +9087,7 @@
           <a:p>
             <a:fld id="{5BCAD085-E8A6-8845-BD4E-CB4CCA059FC4}" type="datetimeFigureOut">
               <a:rPr lang="en-US" smtClean="0"/>
-              <a:t>3/24/2026</a:t>
+              <a:t>3/25/2026</a:t>
             </a:fld>
             <a:endParaRPr lang="en-US"/>
           </a:p>
@@ -9262,7 +9265,7 @@
           <a:p>
             <a:fld id="{5BCAD085-E8A6-8845-BD4E-CB4CCA059FC4}" type="datetimeFigureOut">
               <a:rPr lang="en-US" smtClean="0"/>
-              <a:t>3/24/2026</a:t>
+              <a:t>3/25/2026</a:t>
             </a:fld>
             <a:endParaRPr lang="en-US"/>
           </a:p>
@@ -9430,7 +9433,7 @@
           <a:p>
             <a:fld id="{5BCAD085-E8A6-8845-BD4E-CB4CCA059FC4}" type="datetimeFigureOut">
               <a:rPr lang="en-US" smtClean="0"/>
-              <a:t>3/24/2026</a:t>
+              <a:t>3/25/2026</a:t>
             </a:fld>
             <a:endParaRPr lang="en-US"/>
           </a:p>
@@ -9675,7 +9678,7 @@
           <a:p>
             <a:fld id="{5BCAD085-E8A6-8845-BD4E-CB4CCA059FC4}" type="datetimeFigureOut">
               <a:rPr lang="en-US" smtClean="0"/>
-              <a:t>3/24/2026</a:t>
+              <a:t>3/25/2026</a:t>
             </a:fld>
             <a:endParaRPr lang="en-US"/>
           </a:p>
@@ -9960,7 +9963,7 @@
           <a:p>
             <a:fld id="{5BCAD085-E8A6-8845-BD4E-CB4CCA059FC4}" type="datetimeFigureOut">
               <a:rPr lang="en-US" smtClean="0"/>
-              <a:t>3/24/2026</a:t>
+              <a:t>3/25/2026</a:t>
             </a:fld>
             <a:endParaRPr lang="en-US"/>
           </a:p>
@@ -10379,7 +10382,7 @@
           <a:p>
             <a:fld id="{5BCAD085-E8A6-8845-BD4E-CB4CCA059FC4}" type="datetimeFigureOut">
               <a:rPr lang="en-US" smtClean="0"/>
-              <a:t>3/24/2026</a:t>
+              <a:t>3/25/2026</a:t>
             </a:fld>
             <a:endParaRPr lang="en-US"/>
           </a:p>
@@ -10496,7 +10499,7 @@
           <a:p>
             <a:fld id="{5BCAD085-E8A6-8845-BD4E-CB4CCA059FC4}" type="datetimeFigureOut">
               <a:rPr lang="en-US" smtClean="0"/>
-              <a:t>3/24/2026</a:t>
+              <a:t>3/25/2026</a:t>
             </a:fld>
             <a:endParaRPr lang="en-US"/>
           </a:p>
@@ -10591,7 +10594,7 @@
           <a:p>
             <a:fld id="{5BCAD085-E8A6-8845-BD4E-CB4CCA059FC4}" type="datetimeFigureOut">
               <a:rPr lang="en-US" smtClean="0"/>
-              <a:t>3/24/2026</a:t>
+              <a:t>3/25/2026</a:t>
             </a:fld>
             <a:endParaRPr lang="en-US"/>
           </a:p>
@@ -10866,7 +10869,7 @@
           <a:p>
             <a:fld id="{5BCAD085-E8A6-8845-BD4E-CB4CCA059FC4}" type="datetimeFigureOut">
               <a:rPr lang="en-US" smtClean="0"/>
-              <a:t>3/24/2026</a:t>
+              <a:t>3/25/2026</a:t>
             </a:fld>
             <a:endParaRPr lang="en-US"/>
           </a:p>
@@ -11118,7 +11121,7 @@
           <a:p>
             <a:fld id="{5BCAD085-E8A6-8845-BD4E-CB4CCA059FC4}" type="datetimeFigureOut">
               <a:rPr lang="en-US" smtClean="0"/>
-              <a:t>3/24/2026</a:t>
+              <a:t>3/25/2026</a:t>
             </a:fld>
             <a:endParaRPr lang="en-US"/>
           </a:p>
@@ -11329,7 +11332,7 @@
           <a:p>
             <a:fld id="{5BCAD085-E8A6-8845-BD4E-CB4CCA059FC4}" type="datetimeFigureOut">
               <a:rPr lang="en-US" smtClean="0"/>
-              <a:t>3/24/2026</a:t>
+              <a:t>3/25/2026</a:t>
             </a:fld>
             <a:endParaRPr lang="en-US"/>
           </a:p>
@@ -12145,7 +12148,7 @@
       </p:grpSpPr>
       <p:sp useBgFill="1">
         <p:nvSpPr>
-          <p:cNvPr id="9" name="Rectangle 8">
+          <p:cNvPr id="31" name="Rectangle 30">
             <a:extLst>
               <a:ext uri="{FF2B5EF4-FFF2-40B4-BE49-F238E27FC236}">
                 <a16:creationId xmlns:a16="http://schemas.microsoft.com/office/drawing/2014/main" id="{BACC6370-2D7E-4714-9D71-7542949D7D5D}"/>
@@ -12221,7 +12224,7 @@
       </p:sp>
       <p:sp>
         <p:nvSpPr>
-          <p:cNvPr id="11" name="Rectangle 10">
+          <p:cNvPr id="33" name="Rectangle 32">
             <a:extLst>
               <a:ext uri="{FF2B5EF4-FFF2-40B4-BE49-F238E27FC236}">
                 <a16:creationId xmlns:a16="http://schemas.microsoft.com/office/drawing/2014/main" id="{F68B3F68-107C-434F-AA38-110D5EA91B85}"/>
@@ -12296,7 +12299,7 @@
       </p:sp>
       <p:sp>
         <p:nvSpPr>
-          <p:cNvPr id="13" name="Rectangle 12">
+          <p:cNvPr id="35" name="Rectangle 34">
             <a:extLst>
               <a:ext uri="{FF2B5EF4-FFF2-40B4-BE49-F238E27FC236}">
                 <a16:creationId xmlns:a16="http://schemas.microsoft.com/office/drawing/2014/main" id="{AAD0DBB9-1A4B-4391-81D4-CB19F9AB918A}"/>
@@ -12372,7 +12375,7 @@
       </p:sp>
       <p:sp>
         <p:nvSpPr>
-          <p:cNvPr id="15" name="Rectangle 14">
+          <p:cNvPr id="37" name="Rectangle 36">
             <a:extLst>
               <a:ext uri="{FF2B5EF4-FFF2-40B4-BE49-F238E27FC236}">
                 <a16:creationId xmlns:a16="http://schemas.microsoft.com/office/drawing/2014/main" id="{063BBA22-50EA-4C4D-BE05-F1CE4E63AA56}"/>
@@ -12494,7 +12497,7 @@
             <p:ph idx="1"/>
             <p:extLst>
               <p:ext uri="{D42A27DB-BD31-4B8C-83A1-F6EECF244321}">
-                <p14:modId xmlns:p14="http://schemas.microsoft.com/office/powerpoint/2010/main" val="232089767"/>
+                <p14:modId xmlns:p14="http://schemas.microsoft.com/office/powerpoint/2010/main" val="3702283825"/>
               </p:ext>
             </p:extLst>
           </p:nvPr>
